--- a/week07/Lecture07.pptx
+++ b/week07/Lecture07.pptx
@@ -214,7 +214,7 @@
           <a:p>
             <a:fld id="{634F3F22-B4BB-3F48-9180-464A9F2D66D1}" type="datetimeFigureOut">
               <a:rPr kumimoji="1" lang="zh-CN" altLang="en-US" smtClean="0"/>
-              <a:t>2025/4/1</a:t>
+              <a:t>2026/4/13</a:t>
             </a:fld>
             <a:endParaRPr kumimoji="1" lang="zh-CN" altLang="en-US"/>
           </a:p>
@@ -694,7 +694,7 @@
           <a:p>
             <a:fld id="{FC19A4FA-3D9A-4114-B0D5-759CBD56F1AB}" type="datetimeFigureOut">
               <a:rPr lang="zh-CN" altLang="en-US" smtClean="0"/>
-              <a:t>2025/4/1</a:t>
+              <a:t>2026/4/13</a:t>
             </a:fld>
             <a:endParaRPr lang="zh-CN" altLang="en-US"/>
           </a:p>
@@ -897,7 +897,7 @@
           <a:p>
             <a:fld id="{FC19A4FA-3D9A-4114-B0D5-759CBD56F1AB}" type="datetimeFigureOut">
               <a:rPr lang="zh-CN" altLang="en-US" smtClean="0"/>
-              <a:t>2025/4/1</a:t>
+              <a:t>2026/4/13</a:t>
             </a:fld>
             <a:endParaRPr lang="zh-CN" altLang="en-US"/>
           </a:p>
@@ -1075,7 +1075,7 @@
           <a:p>
             <a:fld id="{FC19A4FA-3D9A-4114-B0D5-759CBD56F1AB}" type="datetimeFigureOut">
               <a:rPr lang="zh-CN" altLang="en-US" smtClean="0"/>
-              <a:t>2025/4/1</a:t>
+              <a:t>2026/4/13</a:t>
             </a:fld>
             <a:endParaRPr lang="zh-CN" altLang="en-US"/>
           </a:p>
@@ -1299,7 +1299,7 @@
           <a:p>
             <a:fld id="{FC19A4FA-3D9A-4114-B0D5-759CBD56F1AB}" type="datetimeFigureOut">
               <a:rPr lang="zh-CN" altLang="en-US" smtClean="0"/>
-              <a:t>2025/4/1</a:t>
+              <a:t>2026/4/13</a:t>
             </a:fld>
             <a:endParaRPr lang="zh-CN" altLang="en-US"/>
           </a:p>
@@ -1533,7 +1533,7 @@
           <a:p>
             <a:fld id="{FC19A4FA-3D9A-4114-B0D5-759CBD56F1AB}" type="datetimeFigureOut">
               <a:rPr lang="zh-CN" altLang="en-US" smtClean="0"/>
-              <a:t>2025/4/1</a:t>
+              <a:t>2026/4/13</a:t>
             </a:fld>
             <a:endParaRPr lang="zh-CN" altLang="en-US"/>
           </a:p>
@@ -1932,7 +1932,7 @@
           <a:p>
             <a:fld id="{FC19A4FA-3D9A-4114-B0D5-759CBD56F1AB}" type="datetimeFigureOut">
               <a:rPr lang="zh-CN" altLang="en-US" smtClean="0"/>
-              <a:t>2025/4/1</a:t>
+              <a:t>2026/4/13</a:t>
             </a:fld>
             <a:endParaRPr lang="zh-CN" altLang="en-US"/>
           </a:p>
@@ -2212,7 +2212,7 @@
           <a:p>
             <a:fld id="{FC19A4FA-3D9A-4114-B0D5-759CBD56F1AB}" type="datetimeFigureOut">
               <a:rPr lang="zh-CN" altLang="en-US" smtClean="0"/>
-              <a:t>2025/4/1</a:t>
+              <a:t>2026/4/13</a:t>
             </a:fld>
             <a:endParaRPr lang="zh-CN" altLang="en-US"/>
           </a:p>
@@ -2364,7 +2364,7 @@
           <a:p>
             <a:fld id="{FC19A4FA-3D9A-4114-B0D5-759CBD56F1AB}" type="datetimeFigureOut">
               <a:rPr lang="zh-CN" altLang="en-US" smtClean="0"/>
-              <a:t>2025/4/1</a:t>
+              <a:t>2026/4/13</a:t>
             </a:fld>
             <a:endParaRPr lang="zh-CN" altLang="en-US"/>
           </a:p>
@@ -2494,7 +2494,7 @@
           <a:p>
             <a:fld id="{FC19A4FA-3D9A-4114-B0D5-759CBD56F1AB}" type="datetimeFigureOut">
               <a:rPr lang="zh-CN" altLang="en-US" smtClean="0"/>
-              <a:t>2025/4/1</a:t>
+              <a:t>2026/4/13</a:t>
             </a:fld>
             <a:endParaRPr lang="zh-CN" altLang="en-US"/>
           </a:p>
@@ -2804,7 +2804,7 @@
           <a:p>
             <a:fld id="{FC19A4FA-3D9A-4114-B0D5-759CBD56F1AB}" type="datetimeFigureOut">
               <a:rPr lang="zh-CN" altLang="en-US" smtClean="0"/>
-              <a:t>2025/4/1</a:t>
+              <a:t>2026/4/13</a:t>
             </a:fld>
             <a:endParaRPr lang="zh-CN" altLang="en-US"/>
           </a:p>
@@ -3091,7 +3091,7 @@
           <a:p>
             <a:fld id="{FC19A4FA-3D9A-4114-B0D5-759CBD56F1AB}" type="datetimeFigureOut">
               <a:rPr lang="zh-CN" altLang="en-US" smtClean="0"/>
-              <a:t>2025/4/1</a:t>
+              <a:t>2026/4/13</a:t>
             </a:fld>
             <a:endParaRPr lang="zh-CN" altLang="en-US"/>
           </a:p>
@@ -3384,7 +3384,7 @@
           <a:p>
             <a:fld id="{FC19A4FA-3D9A-4114-B0D5-759CBD56F1AB}" type="datetimeFigureOut">
               <a:rPr lang="zh-CN" altLang="en-US" smtClean="0"/>
-              <a:t>2025/4/1</a:t>
+              <a:t>2026/4/13</a:t>
             </a:fld>
             <a:endParaRPr lang="zh-CN" altLang="en-US"/>
           </a:p>
@@ -3903,11 +3903,14 @@
               <a:t>于仕琪</a:t>
             </a:r>
             <a:r>
-              <a:rPr lang="en-US" altLang="zh-CN" dirty="0">
+              <a:rPr lang="en-US" altLang="zh-CN">
                 <a:latin typeface="Franklin Gothic Medium" panose="020B0603020102020204" pitchFamily="34" charset="0"/>
               </a:rPr>
               <a:t>)</a:t>
             </a:r>
+            <a:endParaRPr lang="en-US" altLang="zh-CN" dirty="0">
+              <a:latin typeface="Franklin Gothic Medium" panose="020B0603020102020204" pitchFamily="34" charset="0"/>
+            </a:endParaRPr>
           </a:p>
           <a:p>
             <a:r>
